--- a/public/fun/pack/pptx/weddingpro/결혼식프리미엄_18_식순중심_아쿠아스틸.pptx
+++ b/public/fun/pack/pptx/weddingpro/결혼식프리미엄_18_식순중심_아쿠아스틸.pptx
@@ -113,12 +113,12 @@
   <p:extLst>
     <p:ext uri="{521415D9-36F7-43E2-AB2F-B90AF26B5E84}">
       <p14:sectionLst xmlns:p14="http://schemas.microsoft.com/office/powerpoint/2010/main">
-        <p14:section name="시작" id="{624F7973-A9BC-4FEB-B6E3-7770C18F4267}">
+        <p14:section name="시작" id="{295CCC9D-5198-4F89-B954-8615DF566959}">
           <p14:sldIdLst>
             <p14:sldId id="256"/>
           </p14:sldIdLst>
         </p14:section>
-        <p14:section name="본문" id="{0825137D-CCB7-4116-9BDA-063805778585}">
+        <p14:section name="본문" id="{7EE49482-AE92-4197-9DC5-BAFD68A8A28A}">
           <p14:sldIdLst>
             <p14:sldId id="257"/>
             <p14:sldId id="258"/>
@@ -127,7 +127,7 @@
             <p14:sldId id="261"/>
           </p14:sldIdLst>
         </p14:section>
-        <p14:section name="마무리" id="{0D257F5E-0E30-4C9C-B418-1EE1B2574C41}">
+        <p14:section name="마무리" id="{FAB243CE-6B13-4D5E-99DB-F5CE5BCB4E4F}">
           <p14:sldIdLst>
             <p14:sldId id="262"/>
           </p14:sldIdLst>
@@ -1468,7 +1468,7 @@
             </a:lvl1pPr>
           </a:lstStyle>
           <a:p>
-            <a:fld id="{4BA335E7-3217-4B2F-B590-8890D6B26705}" type="slidenum">
+            <a:fld id="{F3B616B4-D5F1-43CE-B933-6737E1EAC166}" type="slidenum">
               <a:rPr lang="en-US"/>
               <a:t>‹#›</a:t>
             </a:fld>
@@ -2135,7 +2135,7 @@
             </a:lvl1pPr>
           </a:lstStyle>
           <a:p>
-            <a:fld id="{C6E0718A-1605-4EB2-A3E8-8191274AB702}" type="slidenum">
+            <a:fld id="{8A2A2605-6CE0-49DA-94EA-C55960790F75}" type="slidenum">
               <a:rPr lang="en-US"/>
               <a:t>‹#›</a:t>
             </a:fld>
@@ -2884,7 +2884,7 @@
             </a:lvl1pPr>
           </a:lstStyle>
           <a:p>
-            <a:fld id="{1FDABEA4-EE20-4A55-A215-0F90CD26CF26}" type="slidenum">
+            <a:fld id="{84AFB424-E2B2-4222-A225-2B7DCD2EE1F0}" type="slidenum">
               <a:rPr lang="en-US"/>
               <a:t>‹#›</a:t>
             </a:fld>
@@ -3775,7 +3775,7 @@
           <a:p>
             <a:r>
               <a:rPr lang="ko-KR"/>
-              <a:t>0000. 00. 00 · 예식장 이름</a:t>
+              <a:t>날짜 입력 · 예식장 이름</a:t>
             </a:r>
           </a:p>
         </p:txBody>
@@ -4020,7 +4020,7 @@
           <a:bodyPr/>
           <a:lstStyle/>
           <a:p>
-            <a:fld id="{83482D10-ABAA-47CF-B017-B865E4B8F0CF}" type="slidenum">
+            <a:fld id="{D2896AA1-74C4-48DC-94B7-05EF3FAE3344}" type="slidenum">
               <a:rPr lang="en-US"/>
               <a:t>‹#›</a:t>
             </a:fld>
@@ -4494,7 +4494,7 @@
           <a:bodyPr/>
           <a:lstStyle/>
           <a:p>
-            <a:fld id="{CAEC1417-A5B8-4DD7-97B0-A578CABA37E0}" type="slidenum">
+            <a:fld id="{64B49923-459B-4F80-BD95-4FE4989E34C6}" type="slidenum">
               <a:rPr lang="en-US"/>
               <a:t>‹#›</a:t>
             </a:fld>
@@ -5345,7 +5345,7 @@
           <a:bodyPr/>
           <a:lstStyle/>
           <a:p>
-            <a:fld id="{6E618034-60ED-456A-84C9-F800179FB730}" type="slidenum">
+            <a:fld id="{EB60B4CF-AAE6-4994-8189-3C5133BE39FE}" type="slidenum">
               <a:rPr lang="en-US"/>
               <a:t>‹#›</a:t>
             </a:fld>
@@ -6763,7 +6763,7 @@
           <a:bodyPr/>
           <a:lstStyle/>
           <a:p>
-            <a:fld id="{4C3B6E12-97EF-480B-9A35-3602BA8803AA}" type="slidenum">
+            <a:fld id="{116289F1-4869-4C4F-9770-FF93BE4D6B81}" type="slidenum">
               <a:rPr lang="en-US"/>
               <a:t>‹#›</a:t>
             </a:fld>
@@ -6873,7 +6873,7 @@
           <a:bodyPr/>
           <a:lstStyle/>
           <a:p>
-            <a:fld id="{4662EAE2-BDB4-4AC7-B7C7-C7A793D2AB49}" type="slidenum">
+            <a:fld id="{58566405-A5A0-4BDD-9245-3B268D3D064C}" type="slidenum">
               <a:rPr lang="en-US"/>
               <a:t>‹#›</a:t>
             </a:fld>
